--- a/АИС/лекции/АИС Лекция 6.pptx
+++ b/АИС/лекции/АИС Лекция 6.pptx
@@ -297,7 +297,8 @@
           <a:p>
             <a:fld id="{DC936407-C9D9-42EE-BAE8-898C36A0846C}" type="datetimeFigureOut">
               <a:rPr lang="ru-RU" smtClean="0"/>
-              <a:t>15.09.2026</a:t>
+              <a:pPr/>
+              <a:t>16.09.2026</a:t>
             </a:fld>
             <a:endParaRPr lang="ru-RU"/>
           </a:p>
@@ -339,6 +340,7 @@
           <a:p>
             <a:fld id="{7AACAC10-08E4-4F1E-ABFE-6575EBEB6B45}" type="slidenum">
               <a:rPr lang="ru-RU" smtClean="0"/>
+              <a:pPr/>
               <a:t>‹#›</a:t>
             </a:fld>
             <a:endParaRPr lang="ru-RU"/>
@@ -462,7 +464,8 @@
           <a:p>
             <a:fld id="{DC936407-C9D9-42EE-BAE8-898C36A0846C}" type="datetimeFigureOut">
               <a:rPr lang="ru-RU" smtClean="0"/>
-              <a:t>15.09.2026</a:t>
+              <a:pPr/>
+              <a:t>16.09.2026</a:t>
             </a:fld>
             <a:endParaRPr lang="ru-RU"/>
           </a:p>
@@ -504,6 +507,7 @@
           <a:p>
             <a:fld id="{7AACAC10-08E4-4F1E-ABFE-6575EBEB6B45}" type="slidenum">
               <a:rPr lang="ru-RU" smtClean="0"/>
+              <a:pPr/>
               <a:t>‹#›</a:t>
             </a:fld>
             <a:endParaRPr lang="ru-RU"/>
@@ -637,7 +641,8 @@
           <a:p>
             <a:fld id="{DC936407-C9D9-42EE-BAE8-898C36A0846C}" type="datetimeFigureOut">
               <a:rPr lang="ru-RU" smtClean="0"/>
-              <a:t>15.09.2026</a:t>
+              <a:pPr/>
+              <a:t>16.09.2026</a:t>
             </a:fld>
             <a:endParaRPr lang="ru-RU"/>
           </a:p>
@@ -679,6 +684,7 @@
           <a:p>
             <a:fld id="{7AACAC10-08E4-4F1E-ABFE-6575EBEB6B45}" type="slidenum">
               <a:rPr lang="ru-RU" smtClean="0"/>
+              <a:pPr/>
               <a:t>‹#›</a:t>
             </a:fld>
             <a:endParaRPr lang="ru-RU"/>
@@ -802,7 +808,8 @@
           <a:p>
             <a:fld id="{DC936407-C9D9-42EE-BAE8-898C36A0846C}" type="datetimeFigureOut">
               <a:rPr lang="ru-RU" smtClean="0"/>
-              <a:t>15.09.2026</a:t>
+              <a:pPr/>
+              <a:t>16.09.2026</a:t>
             </a:fld>
             <a:endParaRPr lang="ru-RU"/>
           </a:p>
@@ -844,6 +851,7 @@
           <a:p>
             <a:fld id="{7AACAC10-08E4-4F1E-ABFE-6575EBEB6B45}" type="slidenum">
               <a:rPr lang="ru-RU" smtClean="0"/>
+              <a:pPr/>
               <a:t>‹#›</a:t>
             </a:fld>
             <a:endParaRPr lang="ru-RU"/>
@@ -1043,7 +1051,8 @@
           <a:p>
             <a:fld id="{DC936407-C9D9-42EE-BAE8-898C36A0846C}" type="datetimeFigureOut">
               <a:rPr lang="ru-RU" smtClean="0"/>
-              <a:t>15.09.2026</a:t>
+              <a:pPr/>
+              <a:t>16.09.2026</a:t>
             </a:fld>
             <a:endParaRPr lang="ru-RU"/>
           </a:p>
@@ -1085,6 +1094,7 @@
           <a:p>
             <a:fld id="{7AACAC10-08E4-4F1E-ABFE-6575EBEB6B45}" type="slidenum">
               <a:rPr lang="ru-RU" smtClean="0"/>
+              <a:pPr/>
               <a:t>‹#›</a:t>
             </a:fld>
             <a:endParaRPr lang="ru-RU"/>
@@ -1326,7 +1336,8 @@
           <a:p>
             <a:fld id="{DC936407-C9D9-42EE-BAE8-898C36A0846C}" type="datetimeFigureOut">
               <a:rPr lang="ru-RU" smtClean="0"/>
-              <a:t>15.09.2026</a:t>
+              <a:pPr/>
+              <a:t>16.09.2026</a:t>
             </a:fld>
             <a:endParaRPr lang="ru-RU"/>
           </a:p>
@@ -1368,6 +1379,7 @@
           <a:p>
             <a:fld id="{7AACAC10-08E4-4F1E-ABFE-6575EBEB6B45}" type="slidenum">
               <a:rPr lang="ru-RU" smtClean="0"/>
+              <a:pPr/>
               <a:t>‹#›</a:t>
             </a:fld>
             <a:endParaRPr lang="ru-RU"/>
@@ -1743,7 +1755,8 @@
           <a:p>
             <a:fld id="{DC936407-C9D9-42EE-BAE8-898C36A0846C}" type="datetimeFigureOut">
               <a:rPr lang="ru-RU" smtClean="0"/>
-              <a:t>15.09.2026</a:t>
+              <a:pPr/>
+              <a:t>16.09.2026</a:t>
             </a:fld>
             <a:endParaRPr lang="ru-RU"/>
           </a:p>
@@ -1785,6 +1798,7 @@
           <a:p>
             <a:fld id="{7AACAC10-08E4-4F1E-ABFE-6575EBEB6B45}" type="slidenum">
               <a:rPr lang="ru-RU" smtClean="0"/>
+              <a:pPr/>
               <a:t>‹#›</a:t>
             </a:fld>
             <a:endParaRPr lang="ru-RU"/>
@@ -1856,7 +1870,8 @@
           <a:p>
             <a:fld id="{DC936407-C9D9-42EE-BAE8-898C36A0846C}" type="datetimeFigureOut">
               <a:rPr lang="ru-RU" smtClean="0"/>
-              <a:t>15.09.2026</a:t>
+              <a:pPr/>
+              <a:t>16.09.2026</a:t>
             </a:fld>
             <a:endParaRPr lang="ru-RU"/>
           </a:p>
@@ -1898,6 +1913,7 @@
           <a:p>
             <a:fld id="{7AACAC10-08E4-4F1E-ABFE-6575EBEB6B45}" type="slidenum">
               <a:rPr lang="ru-RU" smtClean="0"/>
+              <a:pPr/>
               <a:t>‹#›</a:t>
             </a:fld>
             <a:endParaRPr lang="ru-RU"/>
@@ -1946,7 +1962,8 @@
           <a:p>
             <a:fld id="{DC936407-C9D9-42EE-BAE8-898C36A0846C}" type="datetimeFigureOut">
               <a:rPr lang="ru-RU" smtClean="0"/>
-              <a:t>15.09.2026</a:t>
+              <a:pPr/>
+              <a:t>16.09.2026</a:t>
             </a:fld>
             <a:endParaRPr lang="ru-RU"/>
           </a:p>
@@ -1988,6 +2005,7 @@
           <a:p>
             <a:fld id="{7AACAC10-08E4-4F1E-ABFE-6575EBEB6B45}" type="slidenum">
               <a:rPr lang="ru-RU" smtClean="0"/>
+              <a:pPr/>
               <a:t>‹#›</a:t>
             </a:fld>
             <a:endParaRPr lang="ru-RU"/>
@@ -2218,7 +2236,8 @@
           <a:p>
             <a:fld id="{DC936407-C9D9-42EE-BAE8-898C36A0846C}" type="datetimeFigureOut">
               <a:rPr lang="ru-RU" smtClean="0"/>
-              <a:t>15.09.2026</a:t>
+              <a:pPr/>
+              <a:t>16.09.2026</a:t>
             </a:fld>
             <a:endParaRPr lang="ru-RU"/>
           </a:p>
@@ -2260,6 +2279,7 @@
           <a:p>
             <a:fld id="{7AACAC10-08E4-4F1E-ABFE-6575EBEB6B45}" type="slidenum">
               <a:rPr lang="ru-RU" smtClean="0"/>
+              <a:pPr/>
               <a:t>‹#›</a:t>
             </a:fld>
             <a:endParaRPr lang="ru-RU"/>
@@ -2466,7 +2486,8 @@
           <a:p>
             <a:fld id="{DC936407-C9D9-42EE-BAE8-898C36A0846C}" type="datetimeFigureOut">
               <a:rPr lang="ru-RU" smtClean="0"/>
-              <a:t>15.09.2026</a:t>
+              <a:pPr/>
+              <a:t>16.09.2026</a:t>
             </a:fld>
             <a:endParaRPr lang="ru-RU"/>
           </a:p>
@@ -2508,6 +2529,7 @@
           <a:p>
             <a:fld id="{7AACAC10-08E4-4F1E-ABFE-6575EBEB6B45}" type="slidenum">
               <a:rPr lang="ru-RU" smtClean="0"/>
+              <a:pPr/>
               <a:t>‹#›</a:t>
             </a:fld>
             <a:endParaRPr lang="ru-RU"/>
@@ -2674,7 +2696,8 @@
           <a:p>
             <a:fld id="{DC936407-C9D9-42EE-BAE8-898C36A0846C}" type="datetimeFigureOut">
               <a:rPr lang="ru-RU" smtClean="0"/>
-              <a:t>15.09.2026</a:t>
+              <a:pPr/>
+              <a:t>16.09.2026</a:t>
             </a:fld>
             <a:endParaRPr lang="ru-RU"/>
           </a:p>
@@ -2752,6 +2775,7 @@
           <a:p>
             <a:fld id="{7AACAC10-08E4-4F1E-ABFE-6575EBEB6B45}" type="slidenum">
               <a:rPr lang="ru-RU" smtClean="0"/>
+              <a:pPr/>
               <a:t>‹#›</a:t>
             </a:fld>
             <a:endParaRPr lang="ru-RU"/>
@@ -3061,7 +3085,11 @@
           <a:p>
             <a:r>
               <a:rPr lang="ru-RU" b="1" dirty="0"/>
-              <a:t>Практические аспекты администрирования АИС</a:t>
+              <a:t>Практические аспекты администрирования </a:t>
+            </a:r>
+            <a:r>
+              <a:rPr lang="ru-RU" b="1" dirty="0" smtClean="0"/>
+              <a:t>ИС</a:t>
             </a:r>
             <a:endParaRPr lang="ru-RU" dirty="0"/>
           </a:p>
@@ -4939,7 +4967,7 @@
           <a:blip r:embed="rId2">
             <a:extLst>
               <a:ext uri="{28A0092B-C50C-407E-A947-70E740481C1C}">
-                <a14:useLocalDpi xmlns:lc="http://schemas.openxmlformats.org/drawingml/2006/lockedCanvas" xmlns:pic="http://schemas.openxmlformats.org/drawingml/2006/picture" xmlns:a14="http://schemas.microsoft.com/office/drawing/2010/main" xmlns:wps="http://schemas.microsoft.com/office/word/2010/wordprocessingShape" xmlns:wne="http://schemas.microsoft.com/office/word/2006/wordml" xmlns:wpi="http://schemas.microsoft.com/office/word/2010/wordprocessingInk" xmlns:wpg="http://schemas.microsoft.com/office/word/2010/wordprocessingGroup" xmlns:w16se="http://schemas.microsoft.com/office/word/2015/wordml/symex" xmlns:w16sdtdh="http://schemas.microsoft.com/office/word/2020/wordml/sdtdatahash" xmlns:w16="http://schemas.microsoft.com/office/word/2018/wordml" xmlns:w16cid="http://schemas.microsoft.com/office/word/2016/wordml/cid" xmlns:w16cex="http://schemas.microsoft.com/office/word/2018/wordml/cex" xmlns:w15="http://schemas.microsoft.com/office/word/2012/wordml" xmlns:w14="http://schemas.microsoft.com/office/word/2010/wordml" xmlns:w="http://schemas.openxmlformats.org/wordprocessingml/2006/main" xmlns:w10="urn:schemas-microsoft-com:office:word" xmlns:wp="http://schemas.openxmlformats.org/drawingml/2006/wordprocessingDrawing" xmlns:wp14="http://schemas.microsoft.com/office/word/2010/wordprocessingDrawing" xmlns:v="urn:schemas-microsoft-com:vml" xmlns:m="http://schemas.openxmlformats.org/officeDocument/2006/math" xmlns:o="urn:schemas-microsoft-com:office:office" xmlns:am3d="http://schemas.microsoft.com/office/drawing/2017/model3d" xmlns:aink="http://schemas.microsoft.com/office/drawing/2016/ink" xmlns:mc="http://schemas.openxmlformats.org/markup-compatibility/2006" xmlns:cx8="http://schemas.microsoft.com/office/drawing/2016/5/14/chartex" xmlns:cx7="http://schemas.microsoft.com/office/drawing/2016/5/13/chartex" xmlns:cx6="http://schemas.microsoft.com/office/drawing/2016/5/12/chartex" xmlns:cx5="http://schemas.microsoft.com/office/drawing/2016/5/11/chartex" xmlns:cx4="http://schemas.microsoft.com/office/drawing/2016/5/10/chartex" xmlns:cx3="http://schemas.microsoft.com/office/drawing/2016/5/9/chartex" xmlns:cx2="http://schemas.microsoft.com/office/drawing/2015/10/21/chartex" xmlns:cx1="http://schemas.microsoft.com/office/drawing/2015/9/8/chartex" xmlns:cx="http://schemas.microsoft.com/office/drawing/2014/chartex" xmlns:wpc="http://schemas.microsoft.com/office/word/2010/wordprocessingCanvas" xmlns="" val="0"/>
+                <a14:useLocalDpi xmlns="" xmlns:wpc="http://schemas.microsoft.com/office/word/2010/wordprocessingCanvas" xmlns:cx="http://schemas.microsoft.com/office/drawing/2014/chartex" xmlns:cx1="http://schemas.microsoft.com/office/drawing/2015/9/8/chartex" xmlns:cx2="http://schemas.microsoft.com/office/drawing/2015/10/21/chartex" xmlns:cx3="http://schemas.microsoft.com/office/drawing/2016/5/9/chartex" xmlns:cx4="http://schemas.microsoft.com/office/drawing/2016/5/10/chartex" xmlns:cx5="http://schemas.microsoft.com/office/drawing/2016/5/11/chartex" xmlns:cx6="http://schemas.microsoft.com/office/drawing/2016/5/12/chartex" xmlns:cx7="http://schemas.microsoft.com/office/drawing/2016/5/13/chartex" xmlns:cx8="http://schemas.microsoft.com/office/drawing/2016/5/14/chartex" xmlns:mc="http://schemas.openxmlformats.org/markup-compatibility/2006" xmlns:aink="http://schemas.microsoft.com/office/drawing/2016/ink" xmlns:am3d="http://schemas.microsoft.com/office/drawing/2017/model3d" xmlns:o="urn:schemas-microsoft-com:office:office" xmlns:m="http://schemas.openxmlformats.org/officeDocument/2006/math" xmlns:v="urn:schemas-microsoft-com:vml" xmlns:wp14="http://schemas.microsoft.com/office/word/2010/wordprocessingDrawing" xmlns:wp="http://schemas.openxmlformats.org/drawingml/2006/wordprocessingDrawing" xmlns:w10="urn:schemas-microsoft-com:office:word" xmlns:w="http://schemas.openxmlformats.org/wordprocessingml/2006/main" xmlns:w14="http://schemas.microsoft.com/office/word/2010/wordml" xmlns:w15="http://schemas.microsoft.com/office/word/2012/wordml" xmlns:w16cex="http://schemas.microsoft.com/office/word/2018/wordml/cex" xmlns:w16cid="http://schemas.microsoft.com/office/word/2016/wordml/cid" xmlns:w16="http://schemas.microsoft.com/office/word/2018/wordml" xmlns:w16sdtdh="http://schemas.microsoft.com/office/word/2020/wordml/sdtdatahash" xmlns:w16se="http://schemas.microsoft.com/office/word/2015/wordml/symex" xmlns:wpg="http://schemas.microsoft.com/office/word/2010/wordprocessingGroup" xmlns:wpi="http://schemas.microsoft.com/office/word/2010/wordprocessingInk" xmlns:wne="http://schemas.microsoft.com/office/word/2006/wordml" xmlns:wps="http://schemas.microsoft.com/office/word/2010/wordprocessingShape" xmlns:a14="http://schemas.microsoft.com/office/drawing/2010/main" xmlns:pic="http://schemas.openxmlformats.org/drawingml/2006/picture" xmlns:lc="http://schemas.openxmlformats.org/drawingml/2006/lockedCanvas" val="0"/>
               </a:ext>
             </a:extLst>
           </a:blip>
@@ -4960,7 +4988,7 @@
           </a:ln>
           <a:extLst>
             <a:ext uri="{53640926-AAD7-44D8-BBD7-CCE9431645EC}">
-              <a14:shadowObscured xmlns:lc="http://schemas.openxmlformats.org/drawingml/2006/lockedCanvas" xmlns:pic="http://schemas.openxmlformats.org/drawingml/2006/picture" xmlns:a14="http://schemas.microsoft.com/office/drawing/2010/main" xmlns:wps="http://schemas.microsoft.com/office/word/2010/wordprocessingShape" xmlns:wne="http://schemas.microsoft.com/office/word/2006/wordml" xmlns:wpi="http://schemas.microsoft.com/office/word/2010/wordprocessingInk" xmlns:wpg="http://schemas.microsoft.com/office/word/2010/wordprocessingGroup" xmlns:w16se="http://schemas.microsoft.com/office/word/2015/wordml/symex" xmlns:w16sdtdh="http://schemas.microsoft.com/office/word/2020/wordml/sdtdatahash" xmlns:w16="http://schemas.microsoft.com/office/word/2018/wordml" xmlns:w16cid="http://schemas.microsoft.com/office/word/2016/wordml/cid" xmlns:w16cex="http://schemas.microsoft.com/office/word/2018/wordml/cex" xmlns:w15="http://schemas.microsoft.com/office/word/2012/wordml" xmlns:w14="http://schemas.microsoft.com/office/word/2010/wordml" xmlns:w="http://schemas.openxmlformats.org/wordprocessingml/2006/main" xmlns:w10="urn:schemas-microsoft-com:office:word" xmlns:wp="http://schemas.openxmlformats.org/drawingml/2006/wordprocessingDrawing" xmlns:wp14="http://schemas.microsoft.com/office/word/2010/wordprocessingDrawing" xmlns:v="urn:schemas-microsoft-com:vml" xmlns:m="http://schemas.openxmlformats.org/officeDocument/2006/math" xmlns:o="urn:schemas-microsoft-com:office:office" xmlns:am3d="http://schemas.microsoft.com/office/drawing/2017/model3d" xmlns:aink="http://schemas.microsoft.com/office/drawing/2016/ink" xmlns:mc="http://schemas.openxmlformats.org/markup-compatibility/2006" xmlns:cx8="http://schemas.microsoft.com/office/drawing/2016/5/14/chartex" xmlns:cx7="http://schemas.microsoft.com/office/drawing/2016/5/13/chartex" xmlns:cx6="http://schemas.microsoft.com/office/drawing/2016/5/12/chartex" xmlns:cx5="http://schemas.microsoft.com/office/drawing/2016/5/11/chartex" xmlns:cx4="http://schemas.microsoft.com/office/drawing/2016/5/10/chartex" xmlns:cx3="http://schemas.microsoft.com/office/drawing/2016/5/9/chartex" xmlns:cx2="http://schemas.microsoft.com/office/drawing/2015/10/21/chartex" xmlns:cx1="http://schemas.microsoft.com/office/drawing/2015/9/8/chartex" xmlns:cx="http://schemas.microsoft.com/office/drawing/2014/chartex" xmlns:wpc="http://schemas.microsoft.com/office/word/2010/wordprocessingCanvas" xmlns=""/>
+              <a14:shadowObscured xmlns="" xmlns:wpc="http://schemas.microsoft.com/office/word/2010/wordprocessingCanvas" xmlns:cx="http://schemas.microsoft.com/office/drawing/2014/chartex" xmlns:cx1="http://schemas.microsoft.com/office/drawing/2015/9/8/chartex" xmlns:cx2="http://schemas.microsoft.com/office/drawing/2015/10/21/chartex" xmlns:cx3="http://schemas.microsoft.com/office/drawing/2016/5/9/chartex" xmlns:cx4="http://schemas.microsoft.com/office/drawing/2016/5/10/chartex" xmlns:cx5="http://schemas.microsoft.com/office/drawing/2016/5/11/chartex" xmlns:cx6="http://schemas.microsoft.com/office/drawing/2016/5/12/chartex" xmlns:cx7="http://schemas.microsoft.com/office/drawing/2016/5/13/chartex" xmlns:cx8="http://schemas.microsoft.com/office/drawing/2016/5/14/chartex" xmlns:mc="http://schemas.openxmlformats.org/markup-compatibility/2006" xmlns:aink="http://schemas.microsoft.com/office/drawing/2016/ink" xmlns:am3d="http://schemas.microsoft.com/office/drawing/2017/model3d" xmlns:o="urn:schemas-microsoft-com:office:office" xmlns:m="http://schemas.openxmlformats.org/officeDocument/2006/math" xmlns:v="urn:schemas-microsoft-com:vml" xmlns:wp14="http://schemas.microsoft.com/office/word/2010/wordprocessingDrawing" xmlns:wp="http://schemas.openxmlformats.org/drawingml/2006/wordprocessingDrawing" xmlns:w10="urn:schemas-microsoft-com:office:word" xmlns:w="http://schemas.openxmlformats.org/wordprocessingml/2006/main" xmlns:w14="http://schemas.microsoft.com/office/word/2010/wordml" xmlns:w15="http://schemas.microsoft.com/office/word/2012/wordml" xmlns:w16cex="http://schemas.microsoft.com/office/word/2018/wordml/cex" xmlns:w16cid="http://schemas.microsoft.com/office/word/2016/wordml/cid" xmlns:w16="http://schemas.microsoft.com/office/word/2018/wordml" xmlns:w16sdtdh="http://schemas.microsoft.com/office/word/2020/wordml/sdtdatahash" xmlns:w16se="http://schemas.microsoft.com/office/word/2015/wordml/symex" xmlns:wpg="http://schemas.microsoft.com/office/word/2010/wordprocessingGroup" xmlns:wpi="http://schemas.microsoft.com/office/word/2010/wordprocessingInk" xmlns:wne="http://schemas.microsoft.com/office/word/2006/wordml" xmlns:wps="http://schemas.microsoft.com/office/word/2010/wordprocessingShape" xmlns:a14="http://schemas.microsoft.com/office/drawing/2010/main" xmlns:pic="http://schemas.openxmlformats.org/drawingml/2006/picture" xmlns:lc="http://schemas.openxmlformats.org/drawingml/2006/lockedCanvas"/>
             </a:ext>
           </a:extLst>
         </p:spPr>
